--- a/MY家計簿_発表資料.pptx
+++ b/MY家計簿_発表資料.pptx
@@ -4551,13 +4551,13 @@
         </p:nvSpPr>
         <p:spPr>
           <a:xfrm>
-            <a:off x="312174" y="1442884"/>
-            <a:ext cx="9559413" cy="4274422"/>
+            <a:off x="312174" y="1716958"/>
+            <a:ext cx="9559413" cy="3424084"/>
           </a:xfrm>
         </p:spPr>
         <p:txBody>
           <a:bodyPr>
-            <a:normAutofit/>
+            <a:normAutofit fontScale="90000"/>
           </a:bodyPr>
           <a:lstStyle/>
           <a:p>
@@ -4613,6 +4613,25 @@
               <a:t>Firebase</a:t>
             </a:r>
             <a:br>
+              <a:rPr lang="en-US" altLang="ja-JP" sz="3600" b="1" dirty="0">
+                <a:latin typeface="+mn-ea"/>
+                <a:ea typeface="+mn-ea"/>
+              </a:rPr>
+            </a:br>
+            <a:br>
+              <a:rPr lang="en-US" altLang="ja-JP" sz="3600" b="1" dirty="0">
+                <a:latin typeface="+mn-ea"/>
+                <a:ea typeface="+mn-ea"/>
+              </a:rPr>
+            </a:br>
+            <a:r>
+              <a:rPr lang="en-US" altLang="ja-JP" sz="3600" b="1" dirty="0">
+                <a:latin typeface="+mn-ea"/>
+                <a:ea typeface="+mn-ea"/>
+              </a:rPr>
+              <a:t>ChatGPT</a:t>
+            </a:r>
+            <a:br>
               <a:rPr lang="en-US" altLang="ja-JP" sz="3200" b="1" dirty="0">
                 <a:latin typeface="+mn-ea"/>
                 <a:ea typeface="+mn-ea"/>
@@ -4677,8 +4696,19 @@
                 <a:latin typeface="+mn-ea"/>
                 <a:ea typeface="+mn-ea"/>
               </a:rPr>
-              <a:t>構成要素</a:t>
-            </a:r>
+              <a:t>構成要素・使用</a:t>
+            </a:r>
+            <a:r>
+              <a:rPr lang="en-US" altLang="ja-JP" b="1" dirty="0">
+                <a:latin typeface="+mn-ea"/>
+                <a:ea typeface="+mn-ea"/>
+              </a:rPr>
+              <a:t>AI</a:t>
+            </a:r>
+            <a:endParaRPr lang="ja-JP" altLang="en-US" b="1" dirty="0">
+              <a:latin typeface="+mn-ea"/>
+              <a:ea typeface="+mn-ea"/>
+            </a:endParaRPr>
           </a:p>
         </p:txBody>
       </p:sp>
@@ -5166,15 +5196,6 @@
 </file>
 
 <file path=customXml/item2.xml><?xml version="1.0" encoding="utf-8"?>
-<?mso-contentType ?>
-<FormTemplates xmlns="http://schemas.microsoft.com/sharepoint/v3/contenttype/forms">
-  <Display>DocumentLibraryForm</Display>
-  <Edit>DocumentLibraryForm</Edit>
-  <New>DocumentLibraryForm</New>
-</FormTemplates>
-</file>
-
-<file path=customXml/item3.xml><?xml version="1.0" encoding="utf-8"?>
 <ct:contentTypeSchema xmlns:ct="http://schemas.microsoft.com/office/2006/metadata/contentType" xmlns:ma="http://schemas.microsoft.com/office/2006/metadata/properties/metaAttributes" ct:_="" ma:_="" ma:contentTypeName="ドキュメント" ma:contentTypeID="0x010100167FEDDC9DC97440BA0F6A48ADFE26B5" ma:contentTypeVersion="12" ma:contentTypeDescription="新しいドキュメントを作成します。" ma:contentTypeScope="" ma:versionID="827444509ea2b0a5b2e979f36f9e4605">
   <xsd:schema xmlns:xsd="http://www.w3.org/2001/XMLSchema" xmlns:xs="http://www.w3.org/2001/XMLSchema" xmlns:p="http://schemas.microsoft.com/office/2006/metadata/properties" xmlns:ns3="1f4001e7-082c-414c-8403-86384946270a" xmlns:ns4="b905fe17-d65b-40a4-b68e-9ee8fe11f43a" targetNamespace="http://schemas.microsoft.com/office/2006/metadata/properties" ma:root="true" ma:fieldsID="19e05e0fd6f15663df29f3cba469c80d" ns3:_="" ns4:_="">
     <xsd:import namespace="1f4001e7-082c-414c-8403-86384946270a"/>
@@ -5387,6 +5408,15 @@
 </ct:contentTypeSchema>
 </file>
 
+<file path=customXml/item3.xml><?xml version="1.0" encoding="utf-8"?>
+<?mso-contentType ?>
+<FormTemplates xmlns="http://schemas.microsoft.com/sharepoint/v3/contenttype/forms">
+  <Display>DocumentLibraryForm</Display>
+  <Edit>DocumentLibraryForm</Edit>
+  <New>DocumentLibraryForm</New>
+</FormTemplates>
+</file>
+
 <file path=customXml/itemProps1.xml><?xml version="1.0" encoding="utf-8"?>
 <ds:datastoreItem xmlns:ds="http://schemas.openxmlformats.org/officeDocument/2006/customXml" ds:itemID="{7699B72A-4F77-42C5-8E40-4A9D40F64576}">
   <ds:schemaRefs>
@@ -5405,14 +5435,6 @@
 </file>
 
 <file path=customXml/itemProps2.xml><?xml version="1.0" encoding="utf-8"?>
-<ds:datastoreItem xmlns:ds="http://schemas.openxmlformats.org/officeDocument/2006/customXml" ds:itemID="{CD493943-4E20-4010-8444-63F8A456D466}">
-  <ds:schemaRefs>
-    <ds:schemaRef ds:uri="http://schemas.microsoft.com/sharepoint/v3/contenttype/forms"/>
-  </ds:schemaRefs>
-</ds:datastoreItem>
-</file>
-
-<file path=customXml/itemProps3.xml><?xml version="1.0" encoding="utf-8"?>
 <ds:datastoreItem xmlns:ds="http://schemas.openxmlformats.org/officeDocument/2006/customXml" ds:itemID="{883209B1-501E-41CF-9FCC-102241370604}">
   <ds:schemaRefs>
     <ds:schemaRef ds:uri="http://schemas.microsoft.com/office/2006/metadata/contentType"/>
@@ -5429,4 +5451,12 @@
     <ds:schemaRef ds:uri="http://schemas.microsoft.com/internal/obd"/>
   </ds:schemaRefs>
 </ds:datastoreItem>
+</file>
+
+<file path=customXml/itemProps3.xml><?xml version="1.0" encoding="utf-8"?>
+<ds:datastoreItem xmlns:ds="http://schemas.openxmlformats.org/officeDocument/2006/customXml" ds:itemID="{CD493943-4E20-4010-8444-63F8A456D466}">
+  <ds:schemaRefs>
+    <ds:schemaRef ds:uri="http://schemas.microsoft.com/sharepoint/v3/contenttype/forms"/>
+  </ds:schemaRefs>
+</ds:datastoreItem>
 </file>